--- a/dist/초6/국어/토론과글쓰기/초6_국어_토론과글쓰기_02_논설문쓰기_학생용.pptx
+++ b/dist/초6/국어/토론과글쓰기/초6_국어_토론과글쓰기_02_논설문쓰기_학생용.pptx
@@ -120,13 +120,13 @@
   <p:extLst>
     <p:ext uri="{521415D9-36F7-43E2-AB2F-B90AF26B5E84}">
       <p14:sectionLst xmlns:p14="http://schemas.microsoft.com/office/powerpoint/2010/main">
-        <p14:section name="도입" id="{bdc1a351-2d99-1f38-3aa6-5c1118911df5}">
+        <p14:section name="도입" id="{d9871a43-0128-baae-f738-00dd53dedfd5}">
           <p14:sldIdLst>
             <p14:sldId id="256"/>
             <p14:sldId id="257"/>
           </p14:sldIdLst>
         </p14:section>
-        <p14:section name="개념" id="{bcf44e68-18c7-d92d-e9ae-69ecc3a956a4}">
+        <p14:section name="개념" id="{c86182f0-114e-6023-bfaa-cca8aad44f78}">
           <p14:sldIdLst>
             <p14:sldId id="258"/>
             <p14:sldId id="259"/>
@@ -135,25 +135,25 @@
             <p14:sldId id="262"/>
           </p14:sldIdLst>
         </p14:section>
-        <p14:section name="연습" id="{646e6e69-ea50-86f7-c17e-461804bc7494}">
+        <p14:section name="연습" id="{dad0b2c6-fbfa-20a3-b9e6-aaae1b83dc8d}">
           <p14:sldIdLst>
             <p14:sldId id="263"/>
             <p14:sldId id="264"/>
             <p14:sldId id="265"/>
           </p14:sldIdLst>
         </p14:section>
-        <p14:section name="확인" id="{77525375-1b64-323c-cca9-72151075ab43}">
+        <p14:section name="확인" id="{5227e7da-3560-f026-6d22-f2945fc9fa83}">
           <p14:sldIdLst>
             <p14:sldId id="266"/>
             <p14:sldId id="267"/>
           </p14:sldIdLst>
         </p14:section>
-        <p14:section name="정리" id="{cfeaf487-1866-1e4b-f862-419d85dce956}">
+        <p14:section name="정리" id="{f3f3b1e3-a6fe-77f2-5211-b67962107266}">
           <p14:sldIdLst>
             <p14:sldId id="268"/>
           </p14:sldIdLst>
         </p14:section>
-        <p14:section name="보충" id="{1eb452b3-ea40-b7d6-52bd-5da7c13483d1}">
+        <p14:section name="보충" id="{756137f5-2156-695e-2694-6af823cfb99c}">
           <p14:sldIdLst>
             <p14:sldId id="269"/>
           </p14:sldIdLst>
@@ -7121,7 +7121,7 @@
           </p:nvPr>
         </p:nvGraphicFramePr>
         <p:xfrm>
-          <a:off x="836676" y="1490980"/>
+          <a:off x="836676" y="1420876"/>
           <a:ext cx="10515600" cy="914400"/>
         </p:xfrm>
         <a:graphic>
@@ -7132,7 +7132,7 @@
                 <a:gridCol w="2944368"/>
                 <a:gridCol w="7571232"/>
               </a:tblGrid>
-              <a:tr h="433070">
+              <a:tr h="450596">
                 <a:tc>
                   <a:txBody>
                     <a:bodyPr/>
@@ -7270,7 +7270,7 @@
                   </a:tcPr>
                 </a:tc>
               </a:tr>
-              <a:tr h="433070">
+              <a:tr h="450596">
                 <a:tc>
                   <a:txBody>
                     <a:bodyPr/>
@@ -7408,7 +7408,7 @@
                   </a:tcPr>
                 </a:tc>
               </a:tr>
-              <a:tr h="433070">
+              <a:tr h="450596">
                 <a:tc>
                   <a:txBody>
                     <a:bodyPr/>
@@ -7546,7 +7546,7 @@
                   </a:tcPr>
                 </a:tc>
               </a:tr>
-              <a:tr h="433070">
+              <a:tr h="450596">
                 <a:tc>
                   <a:txBody>
                     <a:bodyPr/>
@@ -7684,7 +7684,7 @@
                   </a:tcPr>
                 </a:tc>
               </a:tr>
-              <a:tr h="433070">
+              <a:tr h="450596">
                 <a:tc>
                   <a:txBody>
                     <a:bodyPr/>
@@ -7822,7 +7822,7 @@
                   </a:tcPr>
                 </a:tc>
               </a:tr>
-              <a:tr h="433070">
+              <a:tr h="450596">
                 <a:tc>
                   <a:txBody>
                     <a:bodyPr/>
@@ -7960,7 +7960,7 @@
                   </a:tcPr>
                 </a:tc>
               </a:tr>
-              <a:tr h="433070">
+              <a:tr h="450596">
                 <a:tc>
                   <a:txBody>
                     <a:bodyPr/>
@@ -8098,7 +8098,7 @@
                   </a:tcPr>
                 </a:tc>
               </a:tr>
-              <a:tr h="433070">
+              <a:tr h="450596">
                 <a:tc>
                   <a:txBody>
                     <a:bodyPr/>
